--- a/report/STEM_презентація_ІПЗ-31_1.pptx
+++ b/report/STEM_презентація_ІПЗ-31_1.pptx
@@ -655,7 +655,7 @@
           <a:lstStyle/>
           <a:p>
             <a:r>
-              <a:t>Застосунок працює на трьох контрольних ширинах: 360, 768 і 1280 px. На мобільному таблиця перетворюється на картки, як видно на знімках, і горизонтального скролу немає. Доступність забезпечена семантичними тегами, атрибутами aria, навігацією з клавіатури та контрастом не нижче 4.5 до 1.</a:t>
+              <a:t>Застосунок працює на трьох контрольних ширинах: 360, 768 і 1280 px. На мобільному таблиця перетворюється на картки, як видно на знімках, і горизонтального скролу немає. Доступність забезпечена семантичними тегами, атрибутами aria, навігацією з клавіатури. Вимоги доступності враховано за WCAG 2.2; окремий аудит контрасту не проводився.</a:t>
             </a:r>
           </a:p>
         </p:txBody>
@@ -725,7 +725,7 @@
           <a:lstStyle/>
           <a:p>
             <a:r>
-              <a:t>Якість підтверджена числами, а не на словах: збірка проходить без помилок типів, лінтер дає нуль зауважень, тести - 225 перевірок у 18 файлах, усі пройдено. Покриття становить 96,72 % тверджень, 90,63 % гілок і 98,49 % функцій, що суттєво вище за поріг 80 % із завдання. У реальному браузері помилок консолі не було жодної.</a:t>
+              <a:t>Якість підтверджена числами, а не на словах: збірка проходить без помилок типів, лінтер дає нуль зауважень, тести - 230 перевірок у 18 файлах, усі пройдено. Покриття модулів логіки (lib/api/mocks) становить 96,74 % тверджень, 90,74 % гілок і 98,49 % функцій, що суттєво вище за поріг 80 % із завдання. У реальному браузері помилок консолі не було жодної.</a:t>
             </a:r>
           </a:p>
         </p:txBody>
@@ -6044,7 +6044,7 @@
                 </a:solidFill>
                 <a:latin typeface="Segoe UI"/>
               </a:rPr>
-              <a:t>•  Контраст тексту не нижче 4.5:1.</a:t>
+              <a:t>•  Вимоги доступності - за WCAG 2.2.</a:t>
             </a:r>
           </a:p>
         </p:txBody>
@@ -6815,7 +6815,7 @@
                           </a:solidFill>
                           <a:latin typeface="Segoe UI"/>
                         </a:rPr>
-                        <a:t>225 тестів у 18 файлах, усі пройдено</a:t>
+                        <a:t>230 тестів у 18 файлах, усі пройдено</a:t>
                       </a:r>
                     </a:p>
                   </a:txBody>
@@ -6844,7 +6844,7 @@
                           </a:solidFill>
                           <a:latin typeface="Segoe UI"/>
                         </a:rPr>
-                        <a:t>Покриття</a:t>
+                        <a:t>Покриття (модулі логіки lib/api/mocks)</a:t>
                       </a:r>
                     </a:p>
                   </a:txBody>
@@ -6898,7 +6898,7 @@
                           </a:solidFill>
                           <a:latin typeface="Segoe UI"/>
                         </a:rPr>
-                        <a:t>96,72 % тверджень, 90,63 % гілок, 98,49 % функцій</a:t>
+                        <a:t>96,74 % тверджень, 90,74 % гілок, 98,49 % функцій</a:t>
                       </a:r>
                     </a:p>
                   </a:txBody>
@@ -7522,6 +7522,28 @@
                 </a:solidFill>
                 <a:latin typeface="Segoe UI"/>
               </a:rPr>
+              <a:t>Метрики якості моделі на екрані «Аналітика» синтетичні - це позначено прямо в інтерфейсі.</a:t>
+            </a:r>
+          </a:p>
+          <a:p>
+            <a:pPr algn="l">
+              <a:lnSpc>
+                <a:spcPct val="95000"/>
+              </a:lnSpc>
+              <a:spcBef>
+                <a:spcPts val="0"/>
+              </a:spcBef>
+              <a:spcAft>
+                <a:spcPts val="700"/>
+              </a:spcAft>
+            </a:pPr>
+            <a:r>
+              <a:rPr sz="1600" b="0" i="0">
+                <a:solidFill>
+                  <a:srgbClr val="1F242C"/>
+                </a:solidFill>
+                <a:latin typeface="Segoe UI"/>
+              </a:rPr>
               <a:t>Автентифікація імітована: справжнього сервера авторизації немає.</a:t>
             </a:r>
           </a:p>
@@ -7566,7 +7588,7 @@
                 </a:solidFill>
                 <a:latin typeface="Segoe UI"/>
               </a:rPr>
-              <a:t>Кросбраузерність перевірено в Chromium і Firefox; повний набір старих браузерів не тестувався.</a:t>
+              <a:t>Кросбраузерність перевірено в браузерах на рушії Chromium (Chrome і Edge); повний набір рушіїв не тестувався.</a:t>
             </a:r>
           </a:p>
           <a:p>
@@ -9488,7 +9510,7 @@
                 </a:solidFill>
                 <a:latin typeface="Segoe UI"/>
               </a:rPr>
-              <a:t>тести з покриттям 96,72 %</a:t>
+              <a:t>тести з покриттям 96,74 %</a:t>
             </a:r>
           </a:p>
         </p:txBody>
